--- a/analyses-project/guidance/W5_Figures_as_evidence.pptx
+++ b/analyses-project/guidance/W5_Figures_as_evidence.pptx
@@ -13760,7 +13760,7 @@
                 <a:ea typeface="Calibri" pitchFamily="34" charset="-122"/>
                 <a:cs typeface="Calibri" pitchFamily="34" charset="-120"/>
               </a:rPr>
-              <a:t>Source: Schultz, D. M. (2009) Eloquent Science, American Meteorological Society, §11.10; attribution wording from the project handbook §8.</a:t>
+              <a:t>Source: Schultz, D. M. (2009) Eloquent Science, American Meteorological Society, §11.10; attribution wording from the Student Guide §6.</a:t>
             </a:r>
             <a:endParaRPr lang="en-US" sz="900" dirty="0"/>
           </a:p>

--- a/analyses-project/guidance/W5_Figures_as_evidence.pptx
+++ b/analyses-project/guidance/W5_Figures_as_evidence.pptx
@@ -12173,8 +12173,8 @@
         </p:blipFill>
         <p:spPr>
           <a:xfrm>
-            <a:off x="2882356" y="1234440"/>
-            <a:ext cx="6424240" cy="2971800"/>
+            <a:off x="2981938" y="1234440"/>
+            <a:ext cx="6225077" cy="2971800"/>
           </a:xfrm>
           <a:prstGeom prst="rect">
             <a:avLst/>

--- a/analyses-project/guidance/W5_Figures_as_evidence.pptx
+++ b/analyses-project/guidance/W5_Figures_as_evidence.pptx
@@ -1221,7 +1221,7 @@
             <a:r>
               <a:rPr lang="en-US" dirty="0"/>
               <a:t>EXPLANATION
-The usual p-value formula assumes each data point is independent new information. Monthly ENSO data aren't: if the ONI is high this month, it's almost certainly high next month (lag-1 autocorrelation 0.97). Twelve months of one El Niño are not twelve independent experiments. The effective sample size estimates how many independent pieces of information you really have: n_eff = n(1 − r1x r1y)/(1 + r1x r1y), using each series' month-to-month autocorrelation. With our 247 months, n_eff can be as low as about 30. Compute the p-value with n_eff instead of n, using t = r√(n−2)/√(1−r²) with n−2 degrees of freedom. The notebook's section 6 table does this for you; Task 5D asks you to do it once by hand.</a:t>
+n_eff, the effective sample size, is how many independent pieces of information your data really contain, and it's the n to use for a p-value. Think of the coins: a p-value assumes every data point is a fresh coin pulled from the bucket. Monthly ENSO data aren't like that: if the ONI is high this month it's almost certainly high next month (its lag-1 autocorrelation, r1, is 0.97). Counting twelve months of one El Niño as twelve results is like counting the same coin twelve times. The formula is n_eff = n(1 − r1x r1y)/(1 + r1x r1y), where r1x and r1y are each series' month-to-month autocorrelation. If either series has no memory (r1 = 0), n_eff = n; the more memory both have, the smaller n_eff gets. With our 247 months, n_eff is about 135, 85 or 31 if the cloud series' r1 is 0.3, 0.5 or 0.8. Compute the p-value exactly as before but with n_eff instead of n: t = r√(n−2)/√(1−r²), with n−2 degrees of freedom. A correlation that looks highly significant with 247 can be marginal with 31. The notebook's section 6 table prints n and n_eff and uses n_eff for p and the 95% range; Task 5D asks you to do it once by hand. For a single series, as in the year-to-year test on the next slide, the formula simplifies to n(1 − r1)/(1 + r1).</a:t>
             </a:r>
             <a:endParaRPr lang="en-US" dirty="0"/>
           </a:p>
@@ -1399,7 +1399,7 @@
             <a:r>
               <a:rPr lang="en-US" dirty="0"/>
               <a:t>EXPLANATION
-To compare two years, take each year's 12 monthly anomalies and run a t-test: is the difference in means big compared with the month-to-month scatter? Neighbouring months are correlated (r1 = 0.54 for global cloud), so 12 months behave like about 3.6 independent months, which widens the error bars (coloured bars versus grey). Example: 2010 minus 2011 is 0.51 percentage points, with naive p = 0.02 but adjusted p = 0.24, so it's not significant. Two warnings. With 20 complete years there are 190 possible pairs, so about 10 will look significant by chance; choose your years for a reason before looking. And global cloud falls by about 0.4 percentage points per decade in this record, so years far apart differ partly because of that trend. Notebook section 3b has a DETREND option.</a:t>
+How to read the figure. The thin grey line is every month of global-mean cloud anomaly. Each black dot is one calendar year's mean of those 12 months. The bottom panel is the ONI on the same time axis, red for El Niño months and blue for La Niña, so you can see which years contain events (most events straddle two calendar years). Each year has two bars: the thick grey bar assumes 12 independent months; the black bar uses n_eff. To compare two years, take each year's 12 monthly anomalies and run a t-test: is the difference in means big compared with the month-to-month scatter? Neighbouring months are correlated (r1 = 0.54 for global cloud), and for one series n_eff = n(1 − r1)/(1 + r1) = 12 × 0.46/1.54 ≈ 3.6 independent months per year. That's why the black bars are about twice as long as the grey ones. Example: 2010 minus 2011 is 0.51 percentage points, with naive p = 0.02 but adjusted p = 0.24, so it's not significant. Don't judge by whether the bars overlap: bars can overlap a little and the difference still be significant, so use the test the notebook prints. Two warnings. With 20 complete years there are 190 possible pairs, so about 10 will look significant by chance; choose your years for a reason before looking. And global cloud drifts down by about 0.4 percentage points per decade, especially after 2019, so years far apart differ partly because of that trend. Notebook section 3b has a DETREND option. Why was 2022–23 so low? Tutorial 7 uses it as a worked example of separating evidence from speculation.</a:t>
             </a:r>
             <a:endParaRPr lang="en-US" dirty="0"/>
           </a:p>
